--- a/dataset/guides_final/NET/manual/IT-NET-002-M_사내 네트워크 장애 처리 매뉴얼.pptx
+++ b/dataset/guides_final/NET/manual/IT-NET-002-M_사내 네트워크 장애 처리 매뉴얼.pptx
@@ -38172,7 +38172,7 @@
                 <a:ea typeface="Malgun Gothic"/>
                 <a:cs typeface="Malgun Gothic"/>
               </a:rPr>
-              <a:t>티켓: 담당자 조치가 필요한 건. 담당팀에 배정하고 상태를 RDY → IP → FIN → CLS 으로 관리한다.</a:t>
+              <a:t>티켓: 담당자 조치가 필요한 건. 담당팀에 배정하고 상태를 RDY → WIP → FIN → CLS 으로 관리한다.</a:t>
             </a:r>
           </a:p>
         </p:txBody>

--- a/dataset/guides_final/NET/manual/IT-NET-002-M_사내 네트워크 장애 처리 매뉴얼.pptx
+++ b/dataset/guides_final/NET/manual/IT-NET-002-M_사내 네트워크 장애 처리 매뉴얼.pptx
@@ -3242,7 +3242,7 @@
                 <a:ea typeface="Malgun Gothic"/>
                 <a:cs typeface="Malgun Gothic"/>
               </a:rPr>
-              <a:t>한화시스템 ICT IT 담당자 매뉴얼 · VPN·네트워크</a:t>
+              <a:t>가상 ICT 기업 IT 담당자 매뉴얼 · VPN·네트워크</a:t>
             </a:r>
           </a:p>
         </p:txBody>
@@ -3521,7 +3521,7 @@
                 <a:ea typeface="Malgun Gothic"/>
                 <a:cs typeface="Malgun Gothic"/>
               </a:rPr>
-              <a:t>© HANWHA SYSTEMS ICT · IT-NET-002-M · 사내 제한</a:t>
+              <a:t>© 가상 ICT 기업 · IT-NET-002-M · 사내 제한</a:t>
             </a:r>
           </a:p>
         </p:txBody>
@@ -4744,7 +4744,7 @@
                 <a:ea typeface="Malgun Gothic"/>
                 <a:cs typeface="Malgun Gothic"/>
               </a:rPr>
-              <a:t>© HANWHA SYSTEMS ICT · IT-NET-002-M · 사내 제한</a:t>
+              <a:t>© 가상 ICT 기업 · IT-NET-002-M · 사내 제한</a:t>
             </a:r>
           </a:p>
         </p:txBody>
@@ -7233,7 +7233,7 @@
                 <a:ea typeface="Malgun Gothic"/>
                 <a:cs typeface="Malgun Gothic"/>
               </a:rPr>
-              <a:t>© HANWHA SYSTEMS ICT · IT-NET-002-M · 사내 제한</a:t>
+              <a:t>© 가상 ICT 기업 · IT-NET-002-M · 사내 제한</a:t>
             </a:r>
           </a:p>
         </p:txBody>
@@ -8252,7 +8252,7 @@
                 <a:ea typeface="Malgun Gothic"/>
                 <a:cs typeface="Malgun Gothic"/>
               </a:rPr>
-              <a:t>© HANWHA SYSTEMS ICT · IT-NET-002-M · 사내 제한</a:t>
+              <a:t>© 가상 ICT 기업 · IT-NET-002-M · 사내 제한</a:t>
             </a:r>
           </a:p>
         </p:txBody>
@@ -10679,7 +10679,7 @@
                 <a:ea typeface="Malgun Gothic"/>
                 <a:cs typeface="Malgun Gothic"/>
               </a:rPr>
-              <a:t>© HANWHA SYSTEMS ICT · IT-NET-002-M · 사내 제한</a:t>
+              <a:t>© 가상 ICT 기업 · IT-NET-002-M · 사내 제한</a:t>
             </a:r>
           </a:p>
         </p:txBody>
@@ -11784,7 +11784,7 @@
                 <a:ea typeface="Malgun Gothic"/>
                 <a:cs typeface="Malgun Gothic"/>
               </a:rPr>
-              <a:t>© HANWHA SYSTEMS ICT · IT-NET-002-M · 사내 제한</a:t>
+              <a:t>© 가상 ICT 기업 · IT-NET-002-M · 사내 제한</a:t>
             </a:r>
           </a:p>
         </p:txBody>
@@ -14117,7 +14117,7 @@
                 <a:ea typeface="Malgun Gothic"/>
                 <a:cs typeface="Malgun Gothic"/>
               </a:rPr>
-              <a:t>© HANWHA SYSTEMS ICT · IT-NET-002-M · 사내 제한</a:t>
+              <a:t>© 가상 ICT 기업 · IT-NET-002-M · 사내 제한</a:t>
             </a:r>
           </a:p>
         </p:txBody>
@@ -15340,7 +15340,7 @@
                 <a:ea typeface="Malgun Gothic"/>
                 <a:cs typeface="Malgun Gothic"/>
               </a:rPr>
-              <a:t>© HANWHA SYSTEMS ICT · IT-NET-002-M · 사내 제한</a:t>
+              <a:t>© 가상 ICT 기업 · IT-NET-002-M · 사내 제한</a:t>
             </a:r>
           </a:p>
         </p:txBody>
@@ -17829,7 +17829,7 @@
                 <a:ea typeface="Malgun Gothic"/>
                 <a:cs typeface="Malgun Gothic"/>
               </a:rPr>
-              <a:t>© HANWHA SYSTEMS ICT · IT-NET-002-M · 사내 제한</a:t>
+              <a:t>© 가상 ICT 기업 · IT-NET-002-M · 사내 제한</a:t>
             </a:r>
           </a:p>
         </p:txBody>
@@ -18848,7 +18848,7 @@
                 <a:ea typeface="Malgun Gothic"/>
                 <a:cs typeface="Malgun Gothic"/>
               </a:rPr>
-              <a:t>© HANWHA SYSTEMS ICT · IT-NET-002-M · 사내 제한</a:t>
+              <a:t>© 가상 ICT 기업 · IT-NET-002-M · 사내 제한</a:t>
             </a:r>
           </a:p>
         </p:txBody>
@@ -21385,7 +21385,7 @@
                 <a:ea typeface="Malgun Gothic"/>
                 <a:cs typeface="Malgun Gothic"/>
               </a:rPr>
-              <a:t>© HANWHA SYSTEMS ICT · IT-NET-002-M · 사내 제한</a:t>
+              <a:t>© 가상 ICT 기업 · IT-NET-002-M · 사내 제한</a:t>
             </a:r>
           </a:p>
         </p:txBody>
@@ -23028,7 +23028,7 @@
                 <a:ea typeface="Malgun Gothic"/>
                 <a:cs typeface="Malgun Gothic"/>
               </a:rPr>
-              <a:t>© HANWHA SYSTEMS ICT · IT-NET-002-M · 사내 제한</a:t>
+              <a:t>© 가상 ICT 기업 · IT-NET-002-M · 사내 제한</a:t>
             </a:r>
           </a:p>
         </p:txBody>
@@ -24047,7 +24047,7 @@
                 <a:ea typeface="Malgun Gothic"/>
                 <a:cs typeface="Malgun Gothic"/>
               </a:rPr>
-              <a:t>© HANWHA SYSTEMS ICT · IT-NET-002-M · 사내 제한</a:t>
+              <a:t>© 가상 ICT 기업 · IT-NET-002-M · 사내 제한</a:t>
             </a:r>
           </a:p>
         </p:txBody>
@@ -26616,7 +26616,7 @@
                 <a:ea typeface="Malgun Gothic"/>
                 <a:cs typeface="Malgun Gothic"/>
               </a:rPr>
-              <a:t>© HANWHA SYSTEMS ICT · IT-NET-002-M · 사내 제한</a:t>
+              <a:t>© 가상 ICT 기업 · IT-NET-002-M · 사내 제한</a:t>
             </a:r>
           </a:p>
         </p:txBody>
@@ -27839,7 +27839,7 @@
                 <a:ea typeface="Malgun Gothic"/>
                 <a:cs typeface="Malgun Gothic"/>
               </a:rPr>
-              <a:t>© HANWHA SYSTEMS ICT · IT-NET-002-M · 사내 제한</a:t>
+              <a:t>© 가상 ICT 기업 · IT-NET-002-M · 사내 제한</a:t>
             </a:r>
           </a:p>
         </p:txBody>
@@ -28087,7 +28087,7 @@
                 <a:ea typeface="Malgun Gothic"/>
                 <a:cs typeface="Malgun Gothic"/>
               </a:rPr>
-              <a:t>© HANWHA SYSTEMS ICT · IT-NET-002-M · 사내 제한</a:t>
+              <a:t>© 가상 ICT 기업 · IT-NET-002-M · 사내 제한</a:t>
             </a:r>
           </a:p>
         </p:txBody>
@@ -28770,7 +28770,7 @@
                 <a:ea typeface="Malgun Gothic"/>
                 <a:cs typeface="Malgun Gothic"/>
               </a:rPr>
-              <a:t>© HANWHA SYSTEMS ICT · IT-NET-002-M · 사내 제한</a:t>
+              <a:t>© 가상 ICT 기업 · IT-NET-002-M · 사내 제한</a:t>
             </a:r>
           </a:p>
         </p:txBody>
@@ -29018,7 +29018,7 @@
                 <a:ea typeface="Malgun Gothic"/>
                 <a:cs typeface="Malgun Gothic"/>
               </a:rPr>
-              <a:t>© HANWHA SYSTEMS ICT · IT-NET-002-M · 사내 제한</a:t>
+              <a:t>© 가상 ICT 기업 · IT-NET-002-M · 사내 제한</a:t>
             </a:r>
           </a:p>
         </p:txBody>
@@ -30046,7 +30046,7 @@
                 <a:ea typeface="Malgun Gothic"/>
                 <a:cs typeface="Malgun Gothic"/>
               </a:rPr>
-              <a:t>© HANWHA SYSTEMS ICT · IT-NET-002-M · 사내 제한</a:t>
+              <a:t>© 가상 ICT 기업 · IT-NET-002-M · 사내 제한</a:t>
             </a:r>
           </a:p>
         </p:txBody>
@@ -30294,7 +30294,7 @@
                 <a:ea typeface="Malgun Gothic"/>
                 <a:cs typeface="Malgun Gothic"/>
               </a:rPr>
-              <a:t>© HANWHA SYSTEMS ICT · IT-NET-002-M · 사내 제한</a:t>
+              <a:t>© 가상 ICT 기업 · IT-NET-002-M · 사내 제한</a:t>
             </a:r>
           </a:p>
         </p:txBody>
@@ -30986,7 +30986,7 @@
                 <a:ea typeface="Malgun Gothic"/>
                 <a:cs typeface="Malgun Gothic"/>
               </a:rPr>
-              <a:t>© HANWHA SYSTEMS ICT · IT-NET-002-M · 사내 제한</a:t>
+              <a:t>© 가상 ICT 기업 · IT-NET-002-M · 사내 제한</a:t>
             </a:r>
           </a:p>
         </p:txBody>
@@ -31963,7 +31963,7 @@
                 <a:ea typeface="Malgun Gothic"/>
                 <a:cs typeface="Malgun Gothic"/>
               </a:rPr>
-              <a:t>© HANWHA SYSTEMS ICT · IT-NET-002-M · 사내 제한</a:t>
+              <a:t>© 가상 ICT 기업 · IT-NET-002-M · 사내 제한</a:t>
             </a:r>
           </a:p>
         </p:txBody>
@@ -33109,7 +33109,7 @@
                 <a:ea typeface="Malgun Gothic"/>
                 <a:cs typeface="Malgun Gothic"/>
               </a:rPr>
-              <a:t>© HANWHA SYSTEMS ICT · IT-NET-002-M · 사내 제한</a:t>
+              <a:t>© 가상 ICT 기업 · IT-NET-002-M · 사내 제한</a:t>
             </a:r>
           </a:p>
         </p:txBody>
@@ -33357,7 +33357,7 @@
                 <a:ea typeface="Malgun Gothic"/>
                 <a:cs typeface="Malgun Gothic"/>
               </a:rPr>
-              <a:t>© HANWHA SYSTEMS ICT · IT-NET-002-M · 사내 제한</a:t>
+              <a:t>© 가상 ICT 기업 · IT-NET-002-M · 사내 제한</a:t>
             </a:r>
           </a:p>
         </p:txBody>
@@ -34279,7 +34279,7 @@
                 <a:ea typeface="Malgun Gothic"/>
                 <a:cs typeface="Malgun Gothic"/>
               </a:rPr>
-              <a:t>© HANWHA SYSTEMS ICT · IT-NET-002-M · 사내 제한</a:t>
+              <a:t>© 가상 ICT 기업 · IT-NET-002-M · 사내 제한</a:t>
             </a:r>
           </a:p>
         </p:txBody>
@@ -34527,7 +34527,7 @@
                 <a:ea typeface="Malgun Gothic"/>
                 <a:cs typeface="Malgun Gothic"/>
               </a:rPr>
-              <a:t>© HANWHA SYSTEMS ICT · IT-NET-002-M · 사내 제한</a:t>
+              <a:t>© 가상 ICT 기업 · IT-NET-002-M · 사내 제한</a:t>
             </a:r>
           </a:p>
         </p:txBody>
@@ -38548,7 +38548,7 @@
                 <a:ea typeface="Malgun Gothic"/>
                 <a:cs typeface="Malgun Gothic"/>
               </a:rPr>
-              <a:t>© HANWHA SYSTEMS ICT · IT-NET-002-M · 사내 제한</a:t>
+              <a:t>© 가상 ICT 기업 · IT-NET-002-M · 사내 제한</a:t>
             </a:r>
           </a:p>
         </p:txBody>
@@ -38796,7 +38796,7 @@
                 <a:ea typeface="Malgun Gothic"/>
                 <a:cs typeface="Malgun Gothic"/>
               </a:rPr>
-              <a:t>© HANWHA SYSTEMS ICT · IT-NET-002-M · 사내 제한</a:t>
+              <a:t>© 가상 ICT 기업 · IT-NET-002-M · 사내 제한</a:t>
             </a:r>
           </a:p>
         </p:txBody>
@@ -41271,7 +41271,7 @@
                 <a:ea typeface="Malgun Gothic"/>
                 <a:cs typeface="Malgun Gothic"/>
               </a:rPr>
-              <a:t>© HANWHA SYSTEMS ICT · IT-NET-002-M · 사내 제한</a:t>
+              <a:t>© 가상 ICT 기업 · IT-NET-002-M · 사내 제한</a:t>
             </a:r>
           </a:p>
         </p:txBody>
